--- a/myprojects/RVNL/RVNL Audit & Governance Comparative Analysis.pptx
+++ b/myprojects/RVNL/RVNL Audit & Governance Comparative Analysis.pptx
@@ -4,6 +4,9 @@
   <p:sldMasterIdLst>
     <p:sldMasterId id="2147483648" r:id="rId1"/>
   </p:sldMasterIdLst>
+  <p:notesMasterIdLst>
+    <p:notesMasterId r:id="rId15"/>
+  </p:notesMasterIdLst>
   <p:sldIdLst>
     <p:sldId id="256" r:id="rId2"/>
     <p:sldId id="257" r:id="rId3"/>
@@ -19,25 +22,127 @@
     <p:sldId id="267" r:id="rId13"/>
     <p:sldId id="268" r:id="rId14"/>
   </p:sldIdLst>
-  <p:notesMasterIdLst>
-    <p:notesMasterId r:id="rId15"/>
-  </p:notesMasterIdLst>
   <p:sldSz cx="12192000" cy="6858000"/>
   <p:notesSz cx="6858000" cy="12192000"/>
   <p:embeddedFontLst>
     <p:embeddedFont>
-      <p:font typeface="Quattrocento Sans" charset="-122" pitchFamily="34"/>
+      <p:font typeface="微软雅黑" panose="020B0503020204020204" pitchFamily="34" charset="-122"/>
+      <p:regular r:id="rId16"/>
+      <p:bold r:id="rId17"/>
+    </p:embeddedFont>
+    <p:embeddedFont>
+      <p:font typeface="Liter" panose="020B0604020202020204" charset="0"/>
+      <p:regular r:id="rId18"/>
+    </p:embeddedFont>
+    <p:embeddedFont>
+      <p:font typeface="Oranienbaum" panose="02000506080000020003" pitchFamily="2" charset="0"/>
+      <p:regular r:id="rId19"/>
+    </p:embeddedFont>
+    <p:embeddedFont>
+      <p:font typeface="Quattrocento Sans" panose="020B0502050000020003" pitchFamily="34" charset="0"/>
       <p:regular r:id="rId20"/>
     </p:embeddedFont>
-    <p:embeddedFont>
-      <p:font typeface="Oranienbaum" charset="-122" pitchFamily="34"/>
-      <p:regular r:id="rId21"/>
-    </p:embeddedFont>
-    <p:embeddedFont>
-      <p:font typeface="Liter" charset="-122" pitchFamily="34"/>
-      <p:regular r:id="rId22"/>
-    </p:embeddedFont>
   </p:embeddedFontLst>
+  <p:defaultTextStyle>
+    <a:defPPr>
+      <a:defRPr lang="en-US"/>
+    </a:defPPr>
+    <a:lvl1pPr marL="0" algn="l" defTabSz="914400" rtl="0" eaLnBrk="1" latinLnBrk="0" hangingPunct="1">
+      <a:defRPr sz="1800" kern="1200">
+        <a:solidFill>
+          <a:schemeClr val="tx1"/>
+        </a:solidFill>
+        <a:latin typeface="+mn-lt"/>
+        <a:ea typeface="+mn-ea"/>
+        <a:cs typeface="+mn-cs"/>
+      </a:defRPr>
+    </a:lvl1pPr>
+    <a:lvl2pPr marL="457200" algn="l" defTabSz="914400" rtl="0" eaLnBrk="1" latinLnBrk="0" hangingPunct="1">
+      <a:defRPr sz="1800" kern="1200">
+        <a:solidFill>
+          <a:schemeClr val="tx1"/>
+        </a:solidFill>
+        <a:latin typeface="+mn-lt"/>
+        <a:ea typeface="+mn-ea"/>
+        <a:cs typeface="+mn-cs"/>
+      </a:defRPr>
+    </a:lvl2pPr>
+    <a:lvl3pPr marL="914400" algn="l" defTabSz="914400" rtl="0" eaLnBrk="1" latinLnBrk="0" hangingPunct="1">
+      <a:defRPr sz="1800" kern="1200">
+        <a:solidFill>
+          <a:schemeClr val="tx1"/>
+        </a:solidFill>
+        <a:latin typeface="+mn-lt"/>
+        <a:ea typeface="+mn-ea"/>
+        <a:cs typeface="+mn-cs"/>
+      </a:defRPr>
+    </a:lvl3pPr>
+    <a:lvl4pPr marL="1371600" algn="l" defTabSz="914400" rtl="0" eaLnBrk="1" latinLnBrk="0" hangingPunct="1">
+      <a:defRPr sz="1800" kern="1200">
+        <a:solidFill>
+          <a:schemeClr val="tx1"/>
+        </a:solidFill>
+        <a:latin typeface="+mn-lt"/>
+        <a:ea typeface="+mn-ea"/>
+        <a:cs typeface="+mn-cs"/>
+      </a:defRPr>
+    </a:lvl4pPr>
+    <a:lvl5pPr marL="1828800" algn="l" defTabSz="914400" rtl="0" eaLnBrk="1" latinLnBrk="0" hangingPunct="1">
+      <a:defRPr sz="1800" kern="1200">
+        <a:solidFill>
+          <a:schemeClr val="tx1"/>
+        </a:solidFill>
+        <a:latin typeface="+mn-lt"/>
+        <a:ea typeface="+mn-ea"/>
+        <a:cs typeface="+mn-cs"/>
+      </a:defRPr>
+    </a:lvl5pPr>
+    <a:lvl6pPr marL="2286000" algn="l" defTabSz="914400" rtl="0" eaLnBrk="1" latinLnBrk="0" hangingPunct="1">
+      <a:defRPr sz="1800" kern="1200">
+        <a:solidFill>
+          <a:schemeClr val="tx1"/>
+        </a:solidFill>
+        <a:latin typeface="+mn-lt"/>
+        <a:ea typeface="+mn-ea"/>
+        <a:cs typeface="+mn-cs"/>
+      </a:defRPr>
+    </a:lvl6pPr>
+    <a:lvl7pPr marL="2743200" algn="l" defTabSz="914400" rtl="0" eaLnBrk="1" latinLnBrk="0" hangingPunct="1">
+      <a:defRPr sz="1800" kern="1200">
+        <a:solidFill>
+          <a:schemeClr val="tx1"/>
+        </a:solidFill>
+        <a:latin typeface="+mn-lt"/>
+        <a:ea typeface="+mn-ea"/>
+        <a:cs typeface="+mn-cs"/>
+      </a:defRPr>
+    </a:lvl7pPr>
+    <a:lvl8pPr marL="3200400" algn="l" defTabSz="914400" rtl="0" eaLnBrk="1" latinLnBrk="0" hangingPunct="1">
+      <a:defRPr sz="1800" kern="1200">
+        <a:solidFill>
+          <a:schemeClr val="tx1"/>
+        </a:solidFill>
+        <a:latin typeface="+mn-lt"/>
+        <a:ea typeface="+mn-ea"/>
+        <a:cs typeface="+mn-cs"/>
+      </a:defRPr>
+    </a:lvl8pPr>
+    <a:lvl9pPr marL="3657600" algn="l" defTabSz="914400" rtl="0" eaLnBrk="1" latinLnBrk="0" hangingPunct="1">
+      <a:defRPr sz="1800" kern="1200">
+        <a:solidFill>
+          <a:schemeClr val="tx1"/>
+        </a:solidFill>
+        <a:latin typeface="+mn-lt"/>
+        <a:ea typeface="+mn-ea"/>
+        <a:cs typeface="+mn-cs"/>
+      </a:defRPr>
+    </a:lvl9pPr>
+  </p:defaultTextStyle>
+  <p:extLst>
+    <p:ext uri="{EFAFB233-063F-42B5-8137-9DF3F51BA10A}">
+      <p15:sldGuideLst xmlns:p15="http://schemas.microsoft.com/office/powerpoint/2012/main"/>
+    </p:ext>
+  </p:extLst>
 </p:presentation>
 </file>
 
@@ -63,234 +168,10 @@
           <a:chExt cx="0" cy="0"/>
         </a:xfrm>
       </p:grpSpPr>
-      <p:sp>
-        <p:nvSpPr>
-          <p:cNvPr id="2" name="Header Placeholder 1"/>
-          <p:cNvSpPr>
-            <a:spLocks noGrp="1"/>
-          </p:cNvSpPr>
-          <p:nvPr>
-            <p:ph type="hdr" sz="quarter"/>
-          </p:nvPr>
-        </p:nvSpPr>
-        <p:spPr>
-          <a:xfrm>
-            <a:off x="0" y="0"/>
-            <a:ext cx="2971800" cy="458788"/>
-          </a:xfrm>
-          <a:prstGeom prst="rect">
-            <a:avLst/>
-          </a:prstGeom>
-        </p:spPr>
-        <p:txBody>
-          <a:bodyPr vert="horz" lIns="91440" tIns="45720" rIns="91440" bIns="45720" rtlCol="0"/>
-          <a:lstStyle>
-            <a:lvl1pPr algn="l">
-              <a:defRPr sz="1200"/>
-            </a:lvl1pPr>
-          </a:lstStyle>
-          <a:p>
-            <a:endParaRPr lang="en-US"/>
-          </a:p>
-        </p:txBody>
-      </p:sp>
-      <p:sp>
-        <p:nvSpPr>
-          <p:cNvPr id="3" name="Date Placeholder 2"/>
-          <p:cNvSpPr>
-            <a:spLocks noGrp="1"/>
-          </p:cNvSpPr>
-          <p:nvPr>
-            <p:ph type="dt" idx="1"/>
-          </p:nvPr>
-        </p:nvSpPr>
-        <p:spPr>
-          <a:xfrm>
-            <a:off x="3884613" y="0"/>
-            <a:ext cx="2971800" cy="458788"/>
-          </a:xfrm>
-          <a:prstGeom prst="rect">
-            <a:avLst/>
-          </a:prstGeom>
-        </p:spPr>
-        <p:txBody>
-          <a:bodyPr vert="horz" lIns="91440" tIns="45720" rIns="91440" bIns="45720" rtlCol="0"/>
-          <a:lstStyle>
-            <a:lvl1pPr algn="r">
-              <a:defRPr sz="1200"/>
-            </a:lvl1pPr>
-          </a:lstStyle>
-          <a:p>
-            <a:fld id="{5282F153-3F37-0F45-9E97-73ACFA13230C}" type="datetimeFigureOut">
-              <a:rPr lang="en-US"/>
-              <a:t>7/23/19</a:t>
-            </a:fld>
-            <a:endParaRPr lang="en-US"/>
-          </a:p>
-        </p:txBody>
-      </p:sp>
-      <p:sp>
-        <p:nvSpPr>
-          <p:cNvPr id="4" name="Slide Image Placeholder 3"/>
-          <p:cNvSpPr>
-            <a:spLocks noGrp="1" noRot="1" noChangeAspect="1"/>
-          </p:cNvSpPr>
-          <p:nvPr>
-            <p:ph type="sldImg" idx="2"/>
-          </p:nvPr>
-        </p:nvSpPr>
-        <p:spPr>
-          <a:xfrm>
-            <a:off x="685800" y="1143000"/>
-            <a:ext cx="5486400" cy="3086100"/>
-          </a:xfrm>
-          <a:prstGeom prst="rect">
-            <a:avLst/>
-          </a:prstGeom>
-          <a:noFill/>
-          <a:ln w="12700">
-            <a:solidFill>
-              <a:prstClr val="black"/>
-            </a:solidFill>
-          </a:ln>
-        </p:spPr>
-        <p:txBody>
-          <a:bodyPr vert="horz" lIns="91440" tIns="45720" rIns="91440" bIns="45720" rtlCol="0" anchor="ctr"/>
-          <a:lstStyle/>
-          <a:p>
-            <a:endParaRPr lang="en-US"/>
-          </a:p>
-        </p:txBody>
-      </p:sp>
-      <p:sp>
-        <p:nvSpPr>
-          <p:cNvPr id="5" name="Notes Placeholder 4"/>
-          <p:cNvSpPr>
-            <a:spLocks noGrp="1"/>
-          </p:cNvSpPr>
-          <p:nvPr>
-            <p:ph type="body" sz="quarter" idx="3"/>
-          </p:nvPr>
-        </p:nvSpPr>
-        <p:spPr>
-          <a:xfrm>
-            <a:off x="685800" y="4400550"/>
-            <a:ext cx="5486400" cy="3600450"/>
-          </a:xfrm>
-          <a:prstGeom prst="rect">
-            <a:avLst/>
-          </a:prstGeom>
-        </p:spPr>
-        <p:txBody>
-          <a:bodyPr vert="horz" lIns="91440" tIns="45720" rIns="91440" bIns="45720" rtlCol="0"/>
-          <a:lstStyle/>
-          <a:p>
-            <a:pPr lvl="0"/>
-            <a:r>
-              <a:rPr lang="en-US"/>
-              <a:t>Click to edit Master text styles</a:t>
-            </a:r>
-          </a:p>
-          <a:p>
-            <a:pPr lvl="1"/>
-            <a:r>
-              <a:rPr lang="en-US"/>
-              <a:t>Second level</a:t>
-            </a:r>
-          </a:p>
-          <a:p>
-            <a:pPr lvl="2"/>
-            <a:r>
-              <a:rPr lang="en-US"/>
-              <a:t>Third level</a:t>
-            </a:r>
-          </a:p>
-          <a:p>
-            <a:pPr lvl="3"/>
-            <a:r>
-              <a:rPr lang="en-US"/>
-              <a:t>Fourth level</a:t>
-            </a:r>
-          </a:p>
-          <a:p>
-            <a:pPr lvl="4"/>
-            <a:r>
-              <a:rPr lang="en-US"/>
-              <a:t>Fifth level</a:t>
-            </a:r>
-          </a:p>
-        </p:txBody>
-      </p:sp>
-      <p:sp>
-        <p:nvSpPr>
-          <p:cNvPr id="6" name="Footer Placeholder 5"/>
-          <p:cNvSpPr>
-            <a:spLocks noGrp="1"/>
-          </p:cNvSpPr>
-          <p:nvPr>
-            <p:ph type="ftr" sz="quarter" idx="4"/>
-          </p:nvPr>
-        </p:nvSpPr>
-        <p:spPr>
-          <a:xfrm>
-            <a:off x="0" y="8685213"/>
-            <a:ext cx="2971800" cy="458787"/>
-          </a:xfrm>
-          <a:prstGeom prst="rect">
-            <a:avLst/>
-          </a:prstGeom>
-        </p:spPr>
-        <p:txBody>
-          <a:bodyPr vert="horz" lIns="91440" tIns="45720" rIns="91440" bIns="45720" rtlCol="0" anchor="b"/>
-          <a:lstStyle>
-            <a:lvl1pPr algn="l">
-              <a:defRPr sz="1200"/>
-            </a:lvl1pPr>
-          </a:lstStyle>
-          <a:p>
-            <a:endParaRPr lang="en-US"/>
-          </a:p>
-        </p:txBody>
-      </p:sp>
-      <p:sp>
-        <p:nvSpPr>
-          <p:cNvPr id="7" name="Slide Number Placeholder 6"/>
-          <p:cNvSpPr>
-            <a:spLocks noGrp="1"/>
-          </p:cNvSpPr>
-          <p:nvPr>
-            <p:ph type="sldNum" sz="quarter" idx="5"/>
-          </p:nvPr>
-        </p:nvSpPr>
-        <p:spPr>
-          <a:xfrm>
-            <a:off x="3884613" y="8685213"/>
-            <a:ext cx="2971800" cy="458787"/>
-          </a:xfrm>
-          <a:prstGeom prst="rect">
-            <a:avLst/>
-          </a:prstGeom>
-        </p:spPr>
-        <p:txBody>
-          <a:bodyPr vert="horz" lIns="91440" tIns="45720" rIns="91440" bIns="45720" rtlCol="0" anchor="b"/>
-          <a:lstStyle>
-            <a:lvl1pPr algn="r">
-              <a:defRPr sz="1200"/>
-            </a:lvl1pPr>
-          </a:lstStyle>
-          <a:p>
-            <a:fld id="{CE5E9CC1-C706-0F49-92D6-E571CC5EEA8F}" type="slidenum">
-              <a:rPr lang="en-US"/>
-              <a:t>‹#›</a:t>
-            </a:fld>
-            <a:endParaRPr lang="en-US"/>
-          </a:p>
-        </p:txBody>
-      </p:sp>
     </p:spTree>
     <p:extLst>
       <p:ext uri="{BB962C8B-B14F-4D97-AF65-F5344CB8AC3E}">
-        <p14:creationId xmlns:p14="http://schemas.microsoft.com/office/powerpoint/2010/main" val="1024086991"/>
+        <p14:creationId xmlns:p14="http://schemas.microsoft.com/office/powerpoint/2010/main" val="3930041622"/>
       </p:ext>
     </p:extLst>
   </p:cSld>
@@ -434,10 +315,6 @@
           <a:bodyPr/>
           <a:lstStyle/>
           <a:p>
-            <a:r>
-              <a:rPr lang="en-US" dirty="0"/>
-              <a:t/>
-            </a:r>
             <a:endParaRPr lang="en-US" dirty="0"/>
           </a:p>
         </p:txBody>
@@ -522,10 +399,6 @@
           <a:bodyPr/>
           <a:lstStyle/>
           <a:p>
-            <a:r>
-              <a:rPr lang="en-US" dirty="0"/>
-              <a:t/>
-            </a:r>
             <a:endParaRPr lang="en-US" dirty="0"/>
           </a:p>
         </p:txBody>
@@ -610,10 +483,6 @@
           <a:bodyPr/>
           <a:lstStyle/>
           <a:p>
-            <a:r>
-              <a:rPr lang="en-US" dirty="0"/>
-              <a:t/>
-            </a:r>
             <a:endParaRPr lang="en-US" dirty="0"/>
           </a:p>
         </p:txBody>
@@ -698,10 +567,6 @@
           <a:bodyPr/>
           <a:lstStyle/>
           <a:p>
-            <a:r>
-              <a:rPr lang="en-US" dirty="0"/>
-              <a:t/>
-            </a:r>
             <a:endParaRPr lang="en-US" dirty="0"/>
           </a:p>
         </p:txBody>
@@ -786,10 +651,6 @@
           <a:bodyPr/>
           <a:lstStyle/>
           <a:p>
-            <a:r>
-              <a:rPr lang="en-US" dirty="0"/>
-              <a:t/>
-            </a:r>
             <a:endParaRPr lang="en-US" dirty="0"/>
           </a:p>
         </p:txBody>
@@ -874,10 +735,6 @@
           <a:bodyPr/>
           <a:lstStyle/>
           <a:p>
-            <a:r>
-              <a:rPr lang="en-US" dirty="0"/>
-              <a:t/>
-            </a:r>
             <a:endParaRPr lang="en-US" dirty="0"/>
           </a:p>
         </p:txBody>
@@ -962,10 +819,6 @@
           <a:bodyPr/>
           <a:lstStyle/>
           <a:p>
-            <a:r>
-              <a:rPr lang="en-US" dirty="0"/>
-              <a:t/>
-            </a:r>
             <a:endParaRPr lang="en-US" dirty="0"/>
           </a:p>
         </p:txBody>
@@ -1050,10 +903,6 @@
           <a:bodyPr/>
           <a:lstStyle/>
           <a:p>
-            <a:r>
-              <a:rPr lang="en-US" dirty="0"/>
-              <a:t/>
-            </a:r>
             <a:endParaRPr lang="en-US" dirty="0"/>
           </a:p>
         </p:txBody>
@@ -1138,10 +987,6 @@
           <a:bodyPr/>
           <a:lstStyle/>
           <a:p>
-            <a:r>
-              <a:rPr lang="en-US" dirty="0"/>
-              <a:t/>
-            </a:r>
             <a:endParaRPr lang="en-US" dirty="0"/>
           </a:p>
         </p:txBody>
@@ -1226,10 +1071,6 @@
           <a:bodyPr/>
           <a:lstStyle/>
           <a:p>
-            <a:r>
-              <a:rPr lang="en-US" dirty="0"/>
-              <a:t/>
-            </a:r>
             <a:endParaRPr lang="en-US" dirty="0"/>
           </a:p>
         </p:txBody>
@@ -1314,10 +1155,6 @@
           <a:bodyPr/>
           <a:lstStyle/>
           <a:p>
-            <a:r>
-              <a:rPr lang="en-US" dirty="0"/>
-              <a:t/>
-            </a:r>
             <a:endParaRPr lang="en-US" dirty="0"/>
           </a:p>
         </p:txBody>
@@ -1402,10 +1239,6 @@
           <a:bodyPr/>
           <a:lstStyle/>
           <a:p>
-            <a:r>
-              <a:rPr lang="en-US" dirty="0"/>
-              <a:t/>
-            </a:r>
             <a:endParaRPr lang="en-US" dirty="0"/>
           </a:p>
         </p:txBody>
@@ -1490,10 +1323,6 @@
           <a:bodyPr/>
           <a:lstStyle/>
           <a:p>
-            <a:r>
-              <a:rPr lang="en-US" dirty="0"/>
-              <a:t/>
-            </a:r>
             <a:endParaRPr lang="en-US" dirty="0"/>
           </a:p>
         </p:txBody>
@@ -1572,6 +1401,7 @@
         <a:solidFill>
           <a:srgbClr val="FFFFFF"/>
         </a:solidFill>
+        <a:effectLst/>
       </p:bgPr>
     </p:bg>
     <p:spTree>
@@ -1599,6 +1429,11 @@
 <file path=ppt/slideMasters/slideMaster1.xml><?xml version="1.0" encoding="utf-8"?>
 <p:sldMaster xmlns:a="http://schemas.openxmlformats.org/drawingml/2006/main" xmlns:r="http://schemas.openxmlformats.org/officeDocument/2006/relationships" xmlns:p="http://schemas.openxmlformats.org/presentationml/2006/main">
   <p:cSld>
+    <p:bg>
+      <p:bgRef idx="1001">
+        <a:schemeClr val="bg1"/>
+      </p:bgRef>
+    </p:bg>
     <p:spTree>
       <p:nvGrpSpPr>
         <p:cNvPr id="1" name=""/>
@@ -1882,6 +1717,7 @@
         <a:solidFill>
           <a:srgbClr val="1E3A5F"/>
         </a:solidFill>
+        <a:effectLst/>
       </p:bgPr>
     </p:bg>
     <p:spTree>
@@ -1900,17 +1736,17 @@
       </p:grpSpPr>
       <p:pic>
         <p:nvPicPr>
-          <p:cNvPr id="2" name="Image 0" descr="https://kimi-web-img.moonshot.cn/img/images.presentationgo.com/1da0b76c4d7d0abfcf93ae3e827462790a4d79e2.jpg">    </p:cNvPr>
+          <p:cNvPr id="2" name="Image 0" descr="https://kimi-web-img.moonshot.cn/img/images.presentationgo.com/1da0b76c4d7d0abfcf93ae3e827462790a4d79e2.jpg"/>
           <p:cNvPicPr>
             <a:picLocks noChangeAspect="1"/>
           </p:cNvPicPr>
           <p:nvPr/>
         </p:nvPicPr>
         <p:blipFill>
-          <a:blip r:embed="rId1">
+          <a:blip r:embed="rId3">
             <a:alphaModFix amt="30000"/>
           </a:blip>
-          <a:srcRect l="195" r="195" t="0" b="0"/>
+          <a:srcRect l="195" r="195"/>
           <a:stretch/>
         </p:blipFill>
         <p:spPr>
@@ -1963,7 +1799,7 @@
               </a:path>
             </a:pathLst>
           </a:custGeom>
-          <a:gradFill rotWithShape="1" flip="none">
+          <a:gradFill flip="none" rotWithShape="1">
             <a:gsLst>
               <a:gs pos="0">
                 <a:srgbClr val="1E3A5F">
@@ -2057,7 +1893,7 @@
               </a:lnSpc>
             </a:pPr>
             <a:r>
-              <a:rPr lang="en-US" sz="1200" b="1" spc="360" kern="0" dirty="0">
+              <a:rPr lang="en-US" sz="1200" b="1" kern="0" spc="360" dirty="0">
                 <a:solidFill>
                   <a:srgbClr val="C5A572"/>
                 </a:solidFill>
@@ -3309,7 +3145,6 @@
   </p:clrMapOvr>
   <p:transition>
     <p:fade/>
-    <p:spd val="med"/>
   </p:transition>
 </p:sld>
 </file>
@@ -3322,6 +3157,7 @@
         <a:solidFill>
           <a:srgbClr val="F8F9FA"/>
         </a:solidFill>
+        <a:effectLst/>
       </p:bgPr>
     </p:bg>
     <p:spTree>
@@ -3647,7 +3483,7 @@
               </a:lnSpc>
             </a:pPr>
             <a:r>
-              <a:rPr lang="en-US" sz="1050" b="1" spc="53" kern="0" dirty="0">
+              <a:rPr lang="en-US" sz="1050" b="1" kern="0" spc="53" dirty="0">
                 <a:solidFill>
                   <a:srgbClr val="5A7A96"/>
                 </a:solidFill>
@@ -3765,7 +3601,7 @@
           </a:solidFill>
           <a:ln/>
           <a:effectLst>
-            <a:outerShdw sx="100000" sy="100000" kx="0" ky="0" algn="bl" rotWithShape="0" blurRad="142875" dist="95250" dir="5400000">
+            <a:outerShdw blurRad="142875" dist="95250" dir="5400000" algn="bl" rotWithShape="0">
               <a:srgbClr val="000000">
                 <a:alpha val="10196"/>
               </a:srgbClr>
@@ -4565,7 +4401,7 @@
           </a:solidFill>
           <a:ln/>
           <a:effectLst>
-            <a:outerShdw sx="100000" sy="100000" kx="0" ky="0" algn="bl" rotWithShape="0" blurRad="142875" dist="95250" dir="5400000">
+            <a:outerShdw blurRad="142875" dist="95250" dir="5400000" algn="bl" rotWithShape="0">
               <a:srgbClr val="000000">
                 <a:alpha val="10196"/>
               </a:srgbClr>
@@ -7294,7 +7130,7 @@
           </a:solidFill>
           <a:ln/>
           <a:effectLst>
-            <a:outerShdw sx="100000" sy="100000" kx="0" ky="0" algn="bl" rotWithShape="0" blurRad="142875" dist="95250" dir="5400000">
+            <a:outerShdw blurRad="142875" dist="95250" dir="5400000" algn="bl" rotWithShape="0">
               <a:srgbClr val="000000">
                 <a:alpha val="10196"/>
               </a:srgbClr>
@@ -7752,11 +7588,6 @@
               </a:rPr>
               <a:t>Regular meetings held throughout both financial years with </a:t>
             </a:r>
-            <a:pPr>
-              <a:lnSpc>
-                <a:spcPct val="140000"/>
-              </a:lnSpc>
-            </a:pPr>
             <a:r>
               <a:rPr lang="en-US" sz="1200" b="1" dirty="0">
                 <a:solidFill>
@@ -7768,11 +7599,6 @@
               </a:rPr>
               <a:t>full attendance</a:t>
             </a:r>
-            <a:pPr>
-              <a:lnSpc>
-                <a:spcPct val="140000"/>
-              </a:lnSpc>
-            </a:pPr>
             <a:r>
               <a:rPr lang="en-US" sz="1200" dirty="0">
                 <a:solidFill>
@@ -7851,7 +7677,7 @@
           </a:solidFill>
           <a:ln/>
           <a:effectLst>
-            <a:outerShdw sx="100000" sy="100000" kx="0" ky="0" algn="bl" rotWithShape="0" blurRad="142875" dist="95250" dir="5400000">
+            <a:outerShdw blurRad="142875" dist="95250" dir="5400000" algn="bl" rotWithShape="0">
               <a:srgbClr val="000000">
                 <a:alpha val="10196"/>
               </a:srgbClr>
@@ -8555,7 +8381,6 @@
   </p:clrMapOvr>
   <p:transition>
     <p:fade/>
-    <p:spd val="med"/>
   </p:transition>
 </p:sld>
 </file>
@@ -8568,6 +8393,7 @@
         <a:solidFill>
           <a:srgbClr val="F8F9FA"/>
         </a:solidFill>
+        <a:effectLst/>
       </p:bgPr>
     </p:bg>
     <p:spTree>
@@ -8791,7 +8617,7 @@
               </a:lnSpc>
             </a:pPr>
             <a:r>
-              <a:rPr lang="en-US" sz="1050" b="1" spc="53" kern="0" dirty="0">
+              <a:rPr lang="en-US" sz="1050" b="1" kern="0" spc="53" dirty="0">
                 <a:solidFill>
                   <a:srgbClr val="5A7A96"/>
                 </a:solidFill>
@@ -8909,7 +8735,7 @@
           </a:solidFill>
           <a:ln/>
           <a:effectLst>
-            <a:outerShdw sx="100000" sy="100000" kx="0" ky="0" algn="bl" rotWithShape="0" blurRad="142875" dist="95250" dir="5400000">
+            <a:outerShdw blurRad="142875" dist="95250" dir="5400000" algn="bl" rotWithShape="0">
               <a:srgbClr val="000000">
                 <a:alpha val="10196"/>
               </a:srgbClr>
@@ -10010,7 +9836,7 @@
           </a:solidFill>
           <a:ln/>
           <a:effectLst>
-            <a:outerShdw sx="100000" sy="100000" kx="0" ky="0" algn="bl" rotWithShape="0" blurRad="142875" dist="95250" dir="5400000">
+            <a:outerShdw blurRad="142875" dist="95250" dir="5400000" algn="bl" rotWithShape="0">
               <a:srgbClr val="000000">
                 <a:alpha val="10196"/>
               </a:srgbClr>
@@ -10896,7 +10722,7 @@
           </a:solidFill>
           <a:ln/>
           <a:effectLst>
-            <a:outerShdw sx="100000" sy="100000" kx="0" ky="0" algn="bl" rotWithShape="0" blurRad="142875" dist="95250" dir="5400000">
+            <a:outerShdw blurRad="142875" dist="95250" dir="5400000" algn="bl" rotWithShape="0">
               <a:srgbClr val="000000">
                 <a:alpha val="10196"/>
               </a:srgbClr>
@@ -11781,7 +11607,7 @@
           </a:solidFill>
           <a:ln/>
           <a:effectLst>
-            <a:outerShdw sx="100000" sy="100000" kx="0" ky="0" algn="bl" rotWithShape="0" blurRad="142875" dist="95250" dir="5400000">
+            <a:outerShdw blurRad="142875" dist="95250" dir="5400000" algn="bl" rotWithShape="0">
               <a:srgbClr val="000000">
                 <a:alpha val="10196"/>
               </a:srgbClr>
@@ -12071,11 +11897,6 @@
               </a:rPr>
               <a:t>FY25 initiatives aligned with new </a:t>
             </a:r>
-            <a:pPr>
-              <a:lnSpc>
-                <a:spcPct val="140000"/>
-              </a:lnSpc>
-            </a:pPr>
             <a:r>
               <a:rPr lang="en-US" sz="1200" b="1" dirty="0">
                 <a:solidFill>
@@ -12087,11 +11908,6 @@
               </a:rPr>
               <a:t>Business Responsibility &amp; Sustainability Reporting (BRSR)</a:t>
             </a:r>
-            <a:pPr>
-              <a:lnSpc>
-                <a:spcPct val="140000"/>
-              </a:lnSpc>
-            </a:pPr>
             <a:r>
               <a:rPr lang="en-US" sz="1200" dirty="0">
                 <a:solidFill>
@@ -12114,7 +11930,6 @@
   </p:clrMapOvr>
   <p:transition>
     <p:fade/>
-    <p:spd val="med"/>
   </p:transition>
 </p:sld>
 </file>
@@ -12127,6 +11942,7 @@
         <a:solidFill>
           <a:srgbClr val="F8F9FA"/>
         </a:solidFill>
+        <a:effectLst/>
       </p:bgPr>
     </p:bg>
     <p:spTree>
@@ -12325,7 +12141,7 @@
               </a:lnSpc>
             </a:pPr>
             <a:r>
-              <a:rPr lang="en-US" sz="1050" b="1" spc="53" kern="0" dirty="0">
+              <a:rPr lang="en-US" sz="1050" b="1" kern="0" spc="53" dirty="0">
                 <a:solidFill>
                   <a:srgbClr val="5A7A96"/>
                 </a:solidFill>
@@ -12443,7 +12259,7 @@
           </a:solidFill>
           <a:ln/>
           <a:effectLst>
-            <a:outerShdw sx="100000" sy="100000" kx="0" ky="0" algn="bl" rotWithShape="0" blurRad="142875" dist="95250" dir="5400000">
+            <a:outerShdw blurRad="142875" dist="95250" dir="5400000" algn="bl" rotWithShape="0">
               <a:srgbClr val="000000">
                 <a:alpha val="10196"/>
               </a:srgbClr>
@@ -12874,11 +12690,6 @@
               </a:rPr>
               <a:t>RVNL maintained </a:t>
             </a:r>
-            <a:pPr>
-              <a:lnSpc>
-                <a:spcPct val="140000"/>
-              </a:lnSpc>
-            </a:pPr>
             <a:r>
               <a:rPr lang="en-US" sz="1200" b="1" dirty="0">
                 <a:solidFill>
@@ -12890,11 +12701,6 @@
               </a:rPr>
               <a:t>full compliance</a:t>
             </a:r>
-            <a:pPr>
-              <a:lnSpc>
-                <a:spcPct val="140000"/>
-              </a:lnSpc>
-            </a:pPr>
             <a:r>
               <a:rPr lang="en-US" sz="1200" dirty="0">
                 <a:solidFill>
@@ -13529,7 +13335,7 @@
           </a:solidFill>
           <a:ln/>
           <a:effectLst>
-            <a:outerShdw sx="100000" sy="100000" kx="0" ky="0" algn="bl" rotWithShape="0" blurRad="142875" dist="95250" dir="5400000">
+            <a:outerShdw blurRad="142875" dist="95250" dir="5400000" algn="bl" rotWithShape="0">
               <a:srgbClr val="000000">
                 <a:alpha val="10196"/>
               </a:srgbClr>
@@ -14743,11 +14549,6 @@
               </a:rPr>
               <a:t>Indicator:</a:t>
             </a:r>
-            <a:pPr>
-              <a:lnSpc>
-                <a:spcPct val="120000"/>
-              </a:lnSpc>
-            </a:pPr>
             <a:r>
               <a:rPr lang="en-US" sz="1050" dirty="0">
                 <a:solidFill>
@@ -14826,7 +14627,7 @@
           </a:solidFill>
           <a:ln/>
           <a:effectLst>
-            <a:outerShdw sx="100000" sy="100000" kx="0" ky="0" algn="bl" rotWithShape="0" blurRad="142875" dist="95250" dir="5400000">
+            <a:outerShdw blurRad="142875" dist="95250" dir="5400000" algn="bl" rotWithShape="0">
               <a:srgbClr val="000000">
                 <a:alpha val="10196"/>
               </a:srgbClr>
@@ -15449,11 +15250,6 @@
               </a:rPr>
               <a:t>All RPTs confirmed to be at </a:t>
             </a:r>
-            <a:pPr>
-              <a:lnSpc>
-                <a:spcPct val="120000"/>
-              </a:lnSpc>
-            </a:pPr>
             <a:r>
               <a:rPr lang="en-US" sz="1050" b="1" dirty="0">
                 <a:solidFill>
@@ -16380,11 +16176,6 @@
               </a:rPr>
               <a:t>Annual Secretarial Audit Reports confirmed adherence to governance standards with </a:t>
             </a:r>
-            <a:pPr>
-              <a:lnSpc>
-                <a:spcPct val="130000"/>
-              </a:lnSpc>
-            </a:pPr>
             <a:r>
               <a:rPr lang="en-US" sz="1200" b="1" dirty="0">
                 <a:solidFill>
@@ -16398,11 +16189,6 @@
               </a:rPr>
               <a:t>no material qualifications</a:t>
             </a:r>
-            <a:pPr>
-              <a:lnSpc>
-                <a:spcPct val="130000"/>
-              </a:lnSpc>
-            </a:pPr>
             <a:r>
               <a:rPr lang="en-US" sz="1200" dirty="0">
                 <a:solidFill>
@@ -16793,7 +16579,6 @@
   </p:clrMapOvr>
   <p:transition>
     <p:fade/>
-    <p:spd val="med"/>
   </p:transition>
 </p:sld>
 </file>
@@ -16806,6 +16591,7 @@
         <a:solidFill>
           <a:srgbClr val="1E3A5F"/>
         </a:solidFill>
+        <a:effectLst/>
       </p:bgPr>
     </p:bg>
     <p:spTree>
@@ -16824,17 +16610,17 @@
       </p:grpSpPr>
       <p:pic>
         <p:nvPicPr>
-          <p:cNvPr id="2" name="Image 0" descr="https://kimi-web-img.moonshot.cn/img/www.mcafeetaft.com/1bc22b5ce01dd1c9c3481124f5d55716dd051d3d.jpg">    </p:cNvPr>
+          <p:cNvPr id="2" name="Image 0" descr="https://kimi-web-img.moonshot.cn/img/www.mcafeetaft.com/1bc22b5ce01dd1c9c3481124f5d55716dd051d3d.jpg"/>
           <p:cNvPicPr>
             <a:picLocks noChangeAspect="1"/>
           </p:cNvPicPr>
           <p:nvPr/>
         </p:nvPicPr>
         <p:blipFill>
-          <a:blip r:embed="rId1">
+          <a:blip r:embed="rId3">
             <a:alphaModFix amt="20000"/>
           </a:blip>
-          <a:srcRect l="0" r="0" t="8" b="8"/>
+          <a:srcRect t="8" b="8"/>
           <a:stretch/>
         </p:blipFill>
         <p:spPr>
@@ -16887,7 +16673,7 @@
               </a:path>
             </a:pathLst>
           </a:custGeom>
-          <a:gradFill rotWithShape="1" flip="none">
+          <a:gradFill flip="none" rotWithShape="1">
             <a:gsLst>
               <a:gs pos="0">
                 <a:srgbClr val="1E3A5F">
@@ -16981,7 +16767,7 @@
               </a:lnSpc>
             </a:pPr>
             <a:r>
-              <a:rPr lang="en-US" sz="1065" b="1" spc="320" kern="0" dirty="0">
+              <a:rPr lang="en-US" sz="1065" b="1" kern="0" spc="320" dirty="0">
                 <a:solidFill>
                   <a:srgbClr val="C5A572"/>
                 </a:solidFill>
@@ -17416,11 +17202,6 @@
               </a:rPr>
               <a:t>The change from Anil K. Goyal &amp; Associates to Gandhi Minocha &amp; Co. was executed </a:t>
             </a:r>
-            <a:pPr>
-              <a:lnSpc>
-                <a:spcPct val="140000"/>
-              </a:lnSpc>
-            </a:pPr>
             <a:r>
               <a:rPr lang="en-US" sz="1065" b="1" dirty="0">
                 <a:solidFill>
@@ -17432,11 +17213,6 @@
               </a:rPr>
               <a:t>seamlessly</a:t>
             </a:r>
-            <a:pPr>
-              <a:lnSpc>
-                <a:spcPct val="140000"/>
-              </a:lnSpc>
-            </a:pPr>
             <a:r>
               <a:rPr lang="en-US" sz="1065" dirty="0">
                 <a:solidFill>
@@ -17825,11 +17601,6 @@
               </a:rPr>
               <a:t>FY25 saw more </a:t>
             </a:r>
-            <a:pPr>
-              <a:lnSpc>
-                <a:spcPct val="140000"/>
-              </a:lnSpc>
-            </a:pPr>
             <a:r>
               <a:rPr lang="en-US" sz="1065" b="1" dirty="0">
                 <a:solidFill>
@@ -17841,11 +17612,6 @@
               </a:rPr>
               <a:t>technical depth</a:t>
             </a:r>
-            <a:pPr>
-              <a:lnSpc>
-                <a:spcPct val="140000"/>
-              </a:lnSpc>
-            </a:pPr>
             <a:r>
               <a:rPr lang="en-US" sz="1065" dirty="0">
                 <a:solidFill>
@@ -18291,11 +18057,6 @@
               </a:rPr>
               <a:t>The board and its committees remained </a:t>
             </a:r>
-            <a:pPr>
-              <a:lnSpc>
-                <a:spcPct val="140000"/>
-              </a:lnSpc>
-            </a:pPr>
             <a:r>
               <a:rPr lang="en-US" sz="1065" b="1" dirty="0">
                 <a:solidFill>
@@ -18307,11 +18068,6 @@
               </a:rPr>
               <a:t>robustly led</a:t>
             </a:r>
-            <a:pPr>
-              <a:lnSpc>
-                <a:spcPct val="140000"/>
-              </a:lnSpc>
-            </a:pPr>
             <a:r>
               <a:rPr lang="en-US" sz="1065" dirty="0">
                 <a:solidFill>
@@ -18674,11 +18430,6 @@
               </a:rPr>
               <a:t>RVNL demonstrates </a:t>
             </a:r>
-            <a:pPr>
-              <a:lnSpc>
-                <a:spcPct val="140000"/>
-              </a:lnSpc>
-            </a:pPr>
             <a:r>
               <a:rPr lang="en-US" sz="1065" b="1" dirty="0">
                 <a:solidFill>
@@ -18690,11 +18441,6 @@
               </a:rPr>
               <a:t>strong governance practices</a:t>
             </a:r>
-            <a:pPr>
-              <a:lnSpc>
-                <a:spcPct val="140000"/>
-              </a:lnSpc>
-            </a:pPr>
             <a:r>
               <a:rPr lang="en-US" sz="1065" dirty="0">
                 <a:solidFill>
@@ -19279,7 +19025,6 @@
   </p:clrMapOvr>
   <p:transition>
     <p:fade/>
-    <p:spd val="med"/>
   </p:transition>
 </p:sld>
 </file>
@@ -19292,6 +19037,7 @@
         <a:solidFill>
           <a:srgbClr val="F8F9FA"/>
         </a:solidFill>
+        <a:effectLst/>
       </p:bgPr>
     </p:bg>
     <p:spTree>
@@ -19589,7 +19335,7 @@
               </a:lnSpc>
             </a:pPr>
             <a:r>
-              <a:rPr lang="en-US" sz="1050" b="1" spc="53" kern="0" dirty="0">
+              <a:rPr lang="en-US" sz="1050" b="1" kern="0" spc="53" dirty="0">
                 <a:solidFill>
                   <a:srgbClr val="5A7A96"/>
                 </a:solidFill>
@@ -19707,7 +19453,7 @@
           </a:solidFill>
           <a:ln/>
           <a:effectLst>
-            <a:outerShdw sx="100000" sy="100000" kx="0" ky="0" algn="bl" rotWithShape="0" blurRad="142875" dist="95250" dir="5400000">
+            <a:outerShdw blurRad="142875" dist="95250" dir="5400000" algn="bl" rotWithShape="0">
               <a:srgbClr val="000000">
                 <a:alpha val="10196"/>
               </a:srgbClr>
@@ -20189,7 +19935,7 @@
           </a:solidFill>
           <a:ln/>
           <a:effectLst>
-            <a:outerShdw sx="100000" sy="100000" kx="0" ky="0" algn="bl" rotWithShape="0" blurRad="142875" dist="95250" dir="5400000">
+            <a:outerShdw blurRad="142875" dist="95250" dir="5400000" algn="bl" rotWithShape="0">
               <a:srgbClr val="000000">
                 <a:alpha val="10196"/>
               </a:srgbClr>
@@ -20599,7 +20345,7 @@
           </a:solidFill>
           <a:ln/>
           <a:effectLst>
-            <a:outerShdw sx="100000" sy="100000" kx="0" ky="0" algn="bl" rotWithShape="0" blurRad="142875" dist="95250" dir="5400000">
+            <a:outerShdw blurRad="142875" dist="95250" dir="5400000" algn="bl" rotWithShape="0">
               <a:srgbClr val="000000">
                 <a:alpha val="10196"/>
               </a:srgbClr>
@@ -21083,7 +20829,7 @@
           </a:solidFill>
           <a:ln/>
           <a:effectLst>
-            <a:outerShdw sx="100000" sy="100000" kx="0" ky="0" algn="bl" rotWithShape="0" blurRad="142875" dist="95250" dir="5400000">
+            <a:outerShdw blurRad="142875" dist="95250" dir="5400000" algn="bl" rotWithShape="0">
               <a:srgbClr val="000000">
                 <a:alpha val="10196"/>
               </a:srgbClr>
@@ -21632,11 +21378,6 @@
               </a:rPr>
               <a:t>Purpose:</a:t>
             </a:r>
-            <a:pPr>
-              <a:lnSpc>
-                <a:spcPct val="140000"/>
-              </a:lnSpc>
-            </a:pPr>
             <a:r>
               <a:rPr lang="en-US" sz="1200" dirty="0">
                 <a:solidFill>
@@ -21659,7 +21400,6 @@
   </p:clrMapOvr>
   <p:transition>
     <p:fade/>
-    <p:spd val="med"/>
   </p:transition>
 </p:sld>
 </file>
@@ -21672,6 +21412,7 @@
         <a:solidFill>
           <a:srgbClr val="F8F9FA"/>
         </a:solidFill>
+        <a:effectLst/>
       </p:bgPr>
     </p:bg>
     <p:spTree>
@@ -21915,7 +21656,7 @@
               </a:lnSpc>
             </a:pPr>
             <a:r>
-              <a:rPr lang="en-US" sz="1050" b="1" spc="53" kern="0" dirty="0">
+              <a:rPr lang="en-US" sz="1050" b="1" kern="0" spc="53" dirty="0">
                 <a:solidFill>
                   <a:srgbClr val="5A7A96"/>
                 </a:solidFill>
@@ -22033,7 +21774,7 @@
           </a:solidFill>
           <a:ln/>
           <a:effectLst>
-            <a:outerShdw sx="100000" sy="100000" kx="0" ky="0" algn="bl" rotWithShape="0" blurRad="142875" dist="95250" dir="5400000">
+            <a:outerShdw blurRad="142875" dist="95250" dir="5400000" algn="bl" rotWithShape="0">
               <a:srgbClr val="000000">
                 <a:alpha val="10196"/>
               </a:srgbClr>
@@ -23556,7 +23297,7 @@
           </a:solidFill>
           <a:ln/>
           <a:effectLst>
-            <a:outerShdw sx="100000" sy="100000" kx="0" ky="0" algn="bl" rotWithShape="0" blurRad="142875" dist="95250" dir="5400000">
+            <a:outerShdw blurRad="142875" dist="95250" dir="5400000" algn="bl" rotWithShape="0">
               <a:srgbClr val="000000">
                 <a:alpha val="10196"/>
               </a:srgbClr>
@@ -25367,7 +25108,6 @@
   </p:clrMapOvr>
   <p:transition>
     <p:fade/>
-    <p:spd val="med"/>
   </p:transition>
 </p:sld>
 </file>
@@ -25380,6 +25120,7 @@
         <a:solidFill>
           <a:srgbClr val="F8F9FA"/>
         </a:solidFill>
+        <a:effectLst/>
       </p:bgPr>
     </p:bg>
     <p:spTree>
@@ -25643,7 +25384,7 @@
               </a:lnSpc>
             </a:pPr>
             <a:r>
-              <a:rPr lang="en-US" sz="1050" b="1" spc="53" kern="0" dirty="0">
+              <a:rPr lang="en-US" sz="1050" b="1" kern="0" spc="53" dirty="0">
                 <a:solidFill>
                   <a:srgbClr val="5A7A96"/>
                 </a:solidFill>
@@ -25761,7 +25502,7 @@
           </a:solidFill>
           <a:ln/>
           <a:effectLst>
-            <a:outerShdw sx="100000" sy="100000" kx="0" ky="0" algn="bl" rotWithShape="0" blurRad="142875" dist="95250" dir="5400000">
+            <a:outerShdw blurRad="142875" dist="95250" dir="5400000" algn="bl" rotWithShape="0">
               <a:srgbClr val="000000">
                 <a:alpha val="10196"/>
               </a:srgbClr>
@@ -26155,11 +25896,6 @@
               </a:rPr>
               <a:t>True and Fair View:</a:t>
             </a:r>
-            <a:pPr>
-              <a:lnSpc>
-                <a:spcPct val="140000"/>
-              </a:lnSpc>
-            </a:pPr>
             <a:r>
               <a:rPr lang="en-US" sz="1200" dirty="0">
                 <a:solidFill>
@@ -26310,11 +26046,6 @@
               </a:rPr>
               <a:t>Compliance:</a:t>
             </a:r>
-            <a:pPr>
-              <a:lnSpc>
-                <a:spcPct val="140000"/>
-              </a:lnSpc>
-            </a:pPr>
             <a:r>
               <a:rPr lang="en-US" sz="1200" dirty="0">
                 <a:solidFill>
@@ -26465,11 +26196,6 @@
               </a:rPr>
               <a:t>Report Date:</a:t>
             </a:r>
-            <a:pPr>
-              <a:lnSpc>
-                <a:spcPct val="140000"/>
-              </a:lnSpc>
-            </a:pPr>
             <a:r>
               <a:rPr lang="en-US" sz="1200" dirty="0">
                 <a:solidFill>
@@ -26548,7 +26274,7 @@
           </a:solidFill>
           <a:ln/>
           <a:effectLst>
-            <a:outerShdw sx="100000" sy="100000" kx="0" ky="0" algn="bl" rotWithShape="0" blurRad="142875" dist="95250" dir="5400000">
+            <a:outerShdw blurRad="142875" dist="95250" dir="5400000" algn="bl" rotWithShape="0">
               <a:srgbClr val="000000">
                 <a:alpha val="10196"/>
               </a:srgbClr>
@@ -26942,11 +26668,6 @@
               </a:rPr>
               <a:t>Consistency Maintained:</a:t>
             </a:r>
-            <a:pPr>
-              <a:lnSpc>
-                <a:spcPct val="140000"/>
-              </a:lnSpc>
-            </a:pPr>
             <a:r>
               <a:rPr lang="en-US" sz="1200" dirty="0">
                 <a:solidFill>
@@ -27097,11 +26818,6 @@
               </a:rPr>
               <a:t>Ind AS Compliance:</a:t>
             </a:r>
-            <a:pPr>
-              <a:lnSpc>
-                <a:spcPct val="140000"/>
-              </a:lnSpc>
-            </a:pPr>
             <a:r>
               <a:rPr lang="en-US" sz="1200" dirty="0">
                 <a:solidFill>
@@ -27252,11 +26968,6 @@
               </a:rPr>
               <a:t>Report Date:</a:t>
             </a:r>
-            <a:pPr>
-              <a:lnSpc>
-                <a:spcPct val="140000"/>
-              </a:lnSpc>
-            </a:pPr>
             <a:r>
               <a:rPr lang="en-US" sz="1200" dirty="0">
                 <a:solidFill>
@@ -28893,11 +28604,6 @@
               </a:rPr>
               <a:t>Both audit opinions are </a:t>
             </a:r>
-            <a:pPr>
-              <a:lnSpc>
-                <a:spcPct val="140000"/>
-              </a:lnSpc>
-            </a:pPr>
             <a:r>
               <a:rPr lang="en-US" sz="1200" b="1" dirty="0">
                 <a:solidFill>
@@ -28909,11 +28615,6 @@
               </a:rPr>
               <a:t>unmodified</a:t>
             </a:r>
-            <a:pPr>
-              <a:lnSpc>
-                <a:spcPct val="140000"/>
-              </a:lnSpc>
-            </a:pPr>
             <a:r>
               <a:rPr lang="en-US" sz="1200" dirty="0">
                 <a:solidFill>
@@ -28936,7 +28637,6 @@
   </p:clrMapOvr>
   <p:transition>
     <p:fade/>
-    <p:spd val="med"/>
   </p:transition>
 </p:sld>
 </file>
@@ -28949,6 +28649,7 @@
         <a:solidFill>
           <a:srgbClr val="F8F9FA"/>
         </a:solidFill>
+        <a:effectLst/>
       </p:bgPr>
     </p:bg>
     <p:spTree>
@@ -29097,7 +28798,7 @@
               </a:lnSpc>
             </a:pPr>
             <a:r>
-              <a:rPr lang="en-US" sz="1050" b="1" spc="53" kern="0" dirty="0">
+              <a:rPr lang="en-US" sz="1050" b="1" kern="0" spc="53" dirty="0">
                 <a:solidFill>
                   <a:srgbClr val="5A7A96"/>
                 </a:solidFill>
@@ -29215,7 +28916,7 @@
           </a:solidFill>
           <a:ln/>
           <a:effectLst>
-            <a:outerShdw sx="100000" sy="100000" kx="0" ky="0" algn="bl" rotWithShape="0" blurRad="142875" dist="95250" dir="5400000">
+            <a:outerShdw blurRad="142875" dist="95250" dir="5400000" algn="bl" rotWithShape="0">
               <a:srgbClr val="000000">
                 <a:alpha val="10196"/>
               </a:srgbClr>
@@ -29569,11 +29270,6 @@
               </a:rPr>
               <a:t>Recognition of revenue using the </a:t>
             </a:r>
-            <a:pPr>
-              <a:lnSpc>
-                <a:spcPct val="140000"/>
-              </a:lnSpc>
-            </a:pPr>
             <a:r>
               <a:rPr lang="en-US" sz="1200" b="1" dirty="0">
                 <a:solidFill>
@@ -29585,11 +29281,6 @@
               </a:rPr>
               <a:t>"Percentage of Completion"</a:t>
             </a:r>
-            <a:pPr>
-              <a:lnSpc>
-                <a:spcPct val="140000"/>
-              </a:lnSpc>
-            </a:pPr>
             <a:r>
               <a:rPr lang="en-US" sz="1200" dirty="0">
                 <a:solidFill>
@@ -29844,11 +29535,6 @@
               </a:rPr>
               <a:t>Significance:</a:t>
             </a:r>
-            <a:pPr>
-              <a:lnSpc>
-                <a:spcPct val="120000"/>
-              </a:lnSpc>
-            </a:pPr>
             <a:r>
               <a:rPr lang="en-US" sz="1050" dirty="0">
                 <a:solidFill>
@@ -29927,7 +29613,7 @@
           </a:solidFill>
           <a:ln/>
           <a:effectLst>
-            <a:outerShdw sx="100000" sy="100000" kx="0" ky="0" algn="bl" rotWithShape="0" blurRad="142875" dist="95250" dir="5400000">
+            <a:outerShdw blurRad="142875" dist="95250" dir="5400000" algn="bl" rotWithShape="0">
               <a:srgbClr val="000000">
                 <a:alpha val="10196"/>
               </a:srgbClr>
@@ -30638,7 +30324,7 @@
           </a:solidFill>
           <a:ln/>
           <a:effectLst>
-            <a:outerShdw sx="100000" sy="100000" kx="0" ky="0" algn="bl" rotWithShape="0" blurRad="142875" dist="95250" dir="5400000">
+            <a:outerShdw blurRad="142875" dist="95250" dir="5400000" algn="bl" rotWithShape="0">
               <a:srgbClr val="000000">
                 <a:alpha val="10196"/>
               </a:srgbClr>
@@ -31062,11 +30748,6 @@
               </a:rPr>
               <a:t>Added scrutiny:</a:t>
             </a:r>
-            <a:pPr>
-              <a:lnSpc>
-                <a:spcPct val="120000"/>
-              </a:lnSpc>
-            </a:pPr>
             <a:r>
               <a:rPr lang="en-US" sz="1050" dirty="0">
                 <a:solidFill>
@@ -32835,7 +32516,6 @@
   </p:clrMapOvr>
   <p:transition>
     <p:fade/>
-    <p:spd val="med"/>
   </p:transition>
 </p:sld>
 </file>
@@ -32848,6 +32528,7 @@
         <a:solidFill>
           <a:srgbClr val="F8F9FA"/>
         </a:solidFill>
+        <a:effectLst/>
       </p:bgPr>
     </p:bg>
     <p:spTree>
@@ -32996,7 +32677,7 @@
               </a:lnSpc>
             </a:pPr>
             <a:r>
-              <a:rPr lang="en-US" sz="1050" b="1" spc="53" kern="0" dirty="0">
+              <a:rPr lang="en-US" sz="1050" b="1" kern="0" spc="53" dirty="0">
                 <a:solidFill>
                   <a:srgbClr val="5A7A96"/>
                 </a:solidFill>
@@ -33114,7 +32795,7 @@
           </a:solidFill>
           <a:ln/>
           <a:effectLst>
-            <a:outerShdw sx="100000" sy="100000" kx="0" ky="0" algn="bl" rotWithShape="0" blurRad="142875" dist="95250" dir="5400000">
+            <a:outerShdw blurRad="142875" dist="95250" dir="5400000" algn="bl" rotWithShape="0">
               <a:srgbClr val="000000">
                 <a:alpha val="10196"/>
               </a:srgbClr>
@@ -33557,11 +33238,6 @@
               </a:rPr>
               <a:t>Project Budgeting Process:</a:t>
             </a:r>
-            <a:pPr>
-              <a:lnSpc>
-                <a:spcPct val="120000"/>
-              </a:lnSpc>
-            </a:pPr>
             <a:r>
               <a:rPr lang="en-US" sz="1050" dirty="0">
                 <a:solidFill>
@@ -33719,11 +33395,6 @@
               </a:rPr>
               <a:t>Cost Estimation Procedures:</a:t>
             </a:r>
-            <a:pPr>
-              <a:lnSpc>
-                <a:spcPct val="120000"/>
-              </a:lnSpc>
-            </a:pPr>
             <a:r>
               <a:rPr lang="en-US" sz="1050" dirty="0">
                 <a:solidFill>
@@ -33881,11 +33552,6 @@
               </a:rPr>
               <a:t>Progress Certification:</a:t>
             </a:r>
-            <a:pPr>
-              <a:lnSpc>
-                <a:spcPct val="120000"/>
-              </a:lnSpc>
-            </a:pPr>
             <a:r>
               <a:rPr lang="en-US" sz="1050" dirty="0">
                 <a:solidFill>
@@ -34043,11 +33709,6 @@
               </a:rPr>
               <a:t>Change Order Management:</a:t>
             </a:r>
-            <a:pPr>
-              <a:lnSpc>
-                <a:spcPct val="120000"/>
-              </a:lnSpc>
-            </a:pPr>
             <a:r>
               <a:rPr lang="en-US" sz="1050" dirty="0">
                 <a:solidFill>
@@ -34126,7 +33787,7 @@
           </a:solidFill>
           <a:ln/>
           <a:effectLst>
-            <a:outerShdw sx="100000" sy="100000" kx="0" ky="0" algn="bl" rotWithShape="0" blurRad="142875" dist="95250" dir="5400000">
+            <a:outerShdw blurRad="142875" dist="95250" dir="5400000" algn="bl" rotWithShape="0">
               <a:srgbClr val="000000">
                 <a:alpha val="10196"/>
               </a:srgbClr>
@@ -34646,11 +34307,6 @@
               </a:rPr>
               <a:t>Physical Site Visits:</a:t>
             </a:r>
-            <a:pPr>
-              <a:lnSpc>
-                <a:spcPct val="120000"/>
-              </a:lnSpc>
-            </a:pPr>
             <a:r>
               <a:rPr lang="en-US" sz="1050" dirty="0">
                 <a:solidFill>
@@ -34808,11 +34464,6 @@
               </a:rPr>
               <a:t>Progress Certificates:</a:t>
             </a:r>
-            <a:pPr>
-              <a:lnSpc>
-                <a:spcPct val="120000"/>
-              </a:lnSpc>
-            </a:pPr>
             <a:r>
               <a:rPr lang="en-US" sz="1050" dirty="0">
                 <a:solidFill>
@@ -34970,11 +34621,6 @@
               </a:rPr>
               <a:t>Document Verification:</a:t>
             </a:r>
-            <a:pPr>
-              <a:lnSpc>
-                <a:spcPct val="120000"/>
-              </a:lnSpc>
-            </a:pPr>
             <a:r>
               <a:rPr lang="en-US" sz="1050" dirty="0">
                 <a:solidFill>
@@ -35132,11 +34778,6 @@
               </a:rPr>
               <a:t>Stakeholder Interviews:</a:t>
             </a:r>
-            <a:pPr>
-              <a:lnSpc>
-                <a:spcPct val="120000"/>
-              </a:lnSpc>
-            </a:pPr>
             <a:r>
               <a:rPr lang="en-US" sz="1050" dirty="0">
                 <a:solidFill>
@@ -35215,7 +34856,7 @@
           </a:solidFill>
           <a:ln/>
           <a:effectLst>
-            <a:outerShdw sx="100000" sy="100000" kx="0" ky="0" algn="bl" rotWithShape="0" blurRad="142875" dist="95250" dir="5400000">
+            <a:outerShdw blurRad="142875" dist="95250" dir="5400000" algn="bl" rotWithShape="0">
               <a:srgbClr val="000000">
                 <a:alpha val="10196"/>
               </a:srgbClr>
@@ -35731,11 +35372,6 @@
               </a:rPr>
               <a:t>Historical Accuracy:</a:t>
             </a:r>
-            <a:pPr>
-              <a:lnSpc>
-                <a:spcPct val="120000"/>
-              </a:lnSpc>
-            </a:pPr>
             <a:r>
               <a:rPr lang="en-US" sz="1050" dirty="0">
                 <a:solidFill>
@@ -35893,11 +35529,6 @@
               </a:rPr>
               <a:t>Cost Overrun Analysis:</a:t>
             </a:r>
-            <a:pPr>
-              <a:lnSpc>
-                <a:spcPct val="120000"/>
-              </a:lnSpc>
-            </a:pPr>
             <a:r>
               <a:rPr lang="en-US" sz="1050" dirty="0">
                 <a:solidFill>
@@ -36055,11 +35686,6 @@
               </a:rPr>
               <a:t>Provision Adequacy:</a:t>
             </a:r>
-            <a:pPr>
-              <a:lnSpc>
-                <a:spcPct val="120000"/>
-              </a:lnSpc>
-            </a:pPr>
             <a:r>
               <a:rPr lang="en-US" sz="1050" dirty="0">
                 <a:solidFill>
@@ -36217,11 +35843,6 @@
               </a:rPr>
               <a:t>Trend Analysis:</a:t>
             </a:r>
-            <a:pPr>
-              <a:lnSpc>
-                <a:spcPct val="120000"/>
-              </a:lnSpc>
-            </a:pPr>
             <a:r>
               <a:rPr lang="en-US" sz="1050" dirty="0">
                 <a:solidFill>
@@ -36519,11 +36140,6 @@
               </a:rPr>
               <a:t>Audit Conclusion:</a:t>
             </a:r>
-            <a:pPr>
-              <a:lnSpc>
-                <a:spcPct val="130000"/>
-              </a:lnSpc>
-            </a:pPr>
             <a:r>
               <a:rPr lang="en-US" sz="1200" dirty="0">
                 <a:solidFill>
@@ -36546,7 +36162,6 @@
   </p:clrMapOvr>
   <p:transition>
     <p:fade/>
-    <p:spd val="med"/>
   </p:transition>
 </p:sld>
 </file>
@@ -36559,6 +36174,7 @@
         <a:solidFill>
           <a:srgbClr val="F8F9FA"/>
         </a:solidFill>
+        <a:effectLst/>
       </p:bgPr>
     </p:bg>
     <p:spTree>
@@ -36707,7 +36323,7 @@
               </a:lnSpc>
             </a:pPr>
             <a:r>
-              <a:rPr lang="en-US" sz="1050" b="1" spc="53" kern="0" dirty="0">
+              <a:rPr lang="en-US" sz="1050" b="1" kern="0" spc="53" dirty="0">
                 <a:solidFill>
                   <a:srgbClr val="5A7A96"/>
                 </a:solidFill>
@@ -37018,11 +36634,6 @@
               </a:rPr>
               <a:t>The transition to the new auditor (Gandhi Minocha &amp; Co.) brought a </a:t>
             </a:r>
-            <a:pPr>
-              <a:lnSpc>
-                <a:spcPct val="140000"/>
-              </a:lnSpc>
-            </a:pPr>
             <a:r>
               <a:rPr lang="en-US" sz="1200" b="1" dirty="0">
                 <a:solidFill>
@@ -37036,11 +36647,6 @@
               </a:rPr>
               <a:t>heightened focus</a:t>
             </a:r>
-            <a:pPr>
-              <a:lnSpc>
-                <a:spcPct val="140000"/>
-              </a:lnSpc>
-            </a:pPr>
             <a:r>
               <a:rPr lang="en-US" sz="1200" dirty="0">
                 <a:solidFill>
@@ -37121,7 +36727,7 @@
           </a:solidFill>
           <a:ln/>
           <a:effectLst>
-            <a:outerShdw sx="100000" sy="100000" kx="0" ky="0" algn="bl" rotWithShape="0" blurRad="142875" dist="95250" dir="5400000">
+            <a:outerShdw blurRad="142875" dist="95250" dir="5400000" algn="bl" rotWithShape="0">
               <a:srgbClr val="000000">
                 <a:alpha val="10196"/>
               </a:srgbClr>
@@ -37919,7 +37525,7 @@
           </a:solidFill>
           <a:ln/>
           <a:effectLst>
-            <a:outerShdw sx="100000" sy="100000" kx="0" ky="0" algn="bl" rotWithShape="0" blurRad="142875" dist="95250" dir="5400000">
+            <a:outerShdw blurRad="142875" dist="95250" dir="5400000" algn="bl" rotWithShape="0">
               <a:srgbClr val="000000">
                 <a:alpha val="10196"/>
               </a:srgbClr>
@@ -38799,7 +38405,7 @@
           </a:solidFill>
           <a:ln/>
           <a:effectLst>
-            <a:outerShdw sx="100000" sy="100000" kx="0" ky="0" algn="bl" rotWithShape="0" blurRad="142875" dist="95250" dir="5400000">
+            <a:outerShdw blurRad="142875" dist="95250" dir="5400000" algn="bl" rotWithShape="0">
               <a:srgbClr val="000000">
                 <a:alpha val="10196"/>
               </a:srgbClr>
@@ -39182,11 +38788,6 @@
               </a:rPr>
               <a:t>This classification ensures that infrastructure assets are correctly represented as </a:t>
             </a:r>
-            <a:pPr>
-              <a:lnSpc>
-                <a:spcPct val="140000"/>
-              </a:lnSpc>
-            </a:pPr>
             <a:r>
               <a:rPr lang="en-US" sz="1200" b="1" dirty="0">
                 <a:solidFill>
@@ -39198,11 +38799,6 @@
               </a:rPr>
               <a:t>financial receivables</a:t>
             </a:r>
-            <a:pPr>
-              <a:lnSpc>
-                <a:spcPct val="140000"/>
-              </a:lnSpc>
-            </a:pPr>
             <a:r>
               <a:rPr lang="en-US" sz="1200" dirty="0">
                 <a:solidFill>
@@ -40383,7 +39979,6 @@
   </p:clrMapOvr>
   <p:transition>
     <p:fade/>
-    <p:spd val="med"/>
   </p:transition>
 </p:sld>
 </file>
@@ -40396,6 +39991,7 @@
         <a:solidFill>
           <a:srgbClr val="F8F9FA"/>
         </a:solidFill>
+        <a:effectLst/>
       </p:bgPr>
     </p:bg>
     <p:spTree>
@@ -40834,7 +40430,7 @@
               </a:lnSpc>
             </a:pPr>
             <a:r>
-              <a:rPr lang="en-US" sz="1050" b="1" spc="53" kern="0" dirty="0">
+              <a:rPr lang="en-US" sz="1050" b="1" kern="0" spc="53" dirty="0">
                 <a:solidFill>
                   <a:srgbClr val="5A7A96"/>
                 </a:solidFill>
@@ -40952,7 +40548,7 @@
           </a:solidFill>
           <a:ln/>
           <a:effectLst>
-            <a:outerShdw sx="100000" sy="100000" kx="0" ky="0" algn="bl" rotWithShape="0" blurRad="142875" dist="95250" dir="5400000">
+            <a:outerShdw blurRad="142875" dist="95250" dir="5400000" algn="bl" rotWithShape="0">
               <a:srgbClr val="000000">
                 <a:alpha val="10196"/>
               </a:srgbClr>
@@ -41549,7 +41145,7 @@
           </a:solidFill>
           <a:ln/>
           <a:effectLst>
-            <a:outerShdw sx="100000" sy="100000" kx="0" ky="0" algn="bl" rotWithShape="0" blurRad="142875" dist="95250" dir="5400000">
+            <a:outerShdw blurRad="142875" dist="95250" dir="5400000" algn="bl" rotWithShape="0">
               <a:srgbClr val="000000">
                 <a:alpha val="10196"/>
               </a:srgbClr>
@@ -42139,7 +41735,7 @@
           </a:solidFill>
           <a:ln/>
           <a:effectLst>
-            <a:outerShdw sx="100000" sy="100000" kx="0" ky="0" algn="bl" rotWithShape="0" blurRad="142875" dist="95250" dir="5400000">
+            <a:outerShdw blurRad="142875" dist="95250" dir="5400000" algn="bl" rotWithShape="0">
               <a:srgbClr val="000000">
                 <a:alpha val="10196"/>
               </a:srgbClr>
@@ -42995,7 +42591,7 @@
           </a:solidFill>
           <a:ln/>
           <a:effectLst>
-            <a:outerShdw sx="100000" sy="100000" kx="0" ky="0" algn="bl" rotWithShape="0" blurRad="142875" dist="95250" dir="5400000">
+            <a:outerShdw blurRad="142875" dist="95250" dir="5400000" algn="bl" rotWithShape="0">
               <a:srgbClr val="000000">
                 <a:alpha val="10196"/>
               </a:srgbClr>
@@ -44940,7 +44536,6 @@
   </p:clrMapOvr>
   <p:transition>
     <p:fade/>
-    <p:spd val="med"/>
   </p:transition>
 </p:sld>
 </file>
@@ -44953,6 +44548,7 @@
         <a:solidFill>
           <a:srgbClr val="F8F9FA"/>
         </a:solidFill>
+        <a:effectLst/>
       </p:bgPr>
     </p:bg>
     <p:spTree>
@@ -45207,7 +44803,7 @@
               </a:lnSpc>
             </a:pPr>
             <a:r>
-              <a:rPr lang="en-US" sz="1034" b="1" spc="52" kern="0" dirty="0">
+              <a:rPr lang="en-US" sz="1034" b="1" kern="0" spc="52" dirty="0">
                 <a:solidFill>
                   <a:srgbClr val="5A7A96"/>
                 </a:solidFill>
@@ -45325,7 +44921,7 @@
           </a:solidFill>
           <a:ln/>
           <a:effectLst>
-            <a:outerShdw sx="100000" sy="100000" kx="0" ky="0" algn="bl" rotWithShape="0" blurRad="140677" dist="93785" dir="5400000">
+            <a:outerShdw blurRad="140677" dist="93785" dir="5400000" algn="bl" rotWithShape="0">
               <a:srgbClr val="000000">
                 <a:alpha val="10196"/>
               </a:srgbClr>
@@ -47158,11 +46754,6 @@
               </a:rPr>
               <a:t>Government Representation:</a:t>
             </a:r>
-            <a:pPr>
-              <a:lnSpc>
-                <a:spcPct val="120000"/>
-              </a:lnSpc>
-            </a:pPr>
             <a:r>
               <a:rPr lang="en-US" sz="1034" dirty="0">
                 <a:solidFill>
@@ -47241,7 +46832,7 @@
           </a:solidFill>
           <a:ln/>
           <a:effectLst>
-            <a:outerShdw sx="100000" sy="100000" kx="0" ky="0" algn="bl" rotWithShape="0" blurRad="140677" dist="93785" dir="5400000">
+            <a:outerShdw blurRad="140677" dist="93785" dir="5400000" algn="bl" rotWithShape="0">
               <a:srgbClr val="000000">
                 <a:alpha val="10196"/>
               </a:srgbClr>
@@ -47735,11 +47326,6 @@
               </a:rPr>
               <a:t>Independent Directors served on the Board during </a:t>
             </a:r>
-            <a:pPr>
-              <a:lnSpc>
-                <a:spcPct val="140000"/>
-              </a:lnSpc>
-            </a:pPr>
             <a:r>
               <a:rPr lang="en-US" sz="1034" b="1" dirty="0">
                 <a:solidFill>
@@ -47751,11 +47337,6 @@
               </a:rPr>
               <a:t>both reporting cycles</a:t>
             </a:r>
-            <a:pPr>
-              <a:lnSpc>
-                <a:spcPct val="140000"/>
-              </a:lnSpc>
-            </a:pPr>
             <a:r>
               <a:rPr lang="en-US" sz="1034" dirty="0">
                 <a:solidFill>
@@ -49266,7 +48847,6 @@
   </p:clrMapOvr>
   <p:transition>
     <p:fade/>
-    <p:spd val="med"/>
   </p:transition>
 </p:sld>
 </file>
@@ -49279,31 +48859,31 @@
         <a:srgbClr val="000000"/>
       </a:dk1>
       <a:lt1>
-        <a:srgbClr val="ffffff"/>
+        <a:srgbClr val="FFFFFF"/>
       </a:lt1>
       <a:dk2>
         <a:srgbClr val="333333"/>
       </a:dk2>
       <a:lt2>
-        <a:srgbClr val="eeeeee"/>
+        <a:srgbClr val="EEEEEE"/>
       </a:lt2>
       <a:accent1>
-        <a:srgbClr val="8daac2"/>
+        <a:srgbClr val="8DAAC2"/>
       </a:accent1>
       <a:accent2>
-        <a:srgbClr val="ed7d31"/>
+        <a:srgbClr val="ED7D31"/>
       </a:accent2>
       <a:accent3>
-        <a:srgbClr val="a5a5a5"/>
+        <a:srgbClr val="A5A5A5"/>
       </a:accent3>
       <a:accent4>
-        <a:srgbClr val="ffc000"/>
+        <a:srgbClr val="FFC000"/>
       </a:accent4>
       <a:accent5>
-        <a:srgbClr val="4472c4"/>
+        <a:srgbClr val="4472C4"/>
       </a:accent5>
       <a:accent6>
-        <a:srgbClr val="70ad47"/>
+        <a:srgbClr val="70AD47"/>
       </a:accent6>
       <a:hlink>
         <a:srgbClr val="0563C1"/>
@@ -49564,4 +49144,319 @@
     </a:ext>
   </a:extLst>
 </a:theme>
+</file>
+
+<file path=ppt/theme/theme2.xml><?xml version="1.0" encoding="utf-8"?>
+<a:theme xmlns:a="http://schemas.openxmlformats.org/drawingml/2006/main" name="Office Theme">
+  <a:themeElements>
+    <a:clrScheme name="Office">
+      <a:dk1>
+        <a:sysClr val="windowText" lastClr="000000"/>
+      </a:dk1>
+      <a:lt1>
+        <a:sysClr val="window" lastClr="FFFFFF"/>
+      </a:lt1>
+      <a:dk2>
+        <a:srgbClr val="0E2841"/>
+      </a:dk2>
+      <a:lt2>
+        <a:srgbClr val="E8E8E8"/>
+      </a:lt2>
+      <a:accent1>
+        <a:srgbClr val="156082"/>
+      </a:accent1>
+      <a:accent2>
+        <a:srgbClr val="E97132"/>
+      </a:accent2>
+      <a:accent3>
+        <a:srgbClr val="196B24"/>
+      </a:accent3>
+      <a:accent4>
+        <a:srgbClr val="0F9ED5"/>
+      </a:accent4>
+      <a:accent5>
+        <a:srgbClr val="A02B93"/>
+      </a:accent5>
+      <a:accent6>
+        <a:srgbClr val="4EA72E"/>
+      </a:accent6>
+      <a:hlink>
+        <a:srgbClr val="467886"/>
+      </a:hlink>
+      <a:folHlink>
+        <a:srgbClr val="96607D"/>
+      </a:folHlink>
+    </a:clrScheme>
+    <a:fontScheme name="Office">
+      <a:majorFont>
+        <a:latin typeface="Aptos Display" panose="02110004020202020204"/>
+        <a:ea typeface=""/>
+        <a:cs typeface=""/>
+        <a:font script="Jpan" typeface="游ゴシック Light"/>
+        <a:font script="Hang" typeface="맑은 고딕"/>
+        <a:font script="Hans" typeface="等线 Light"/>
+        <a:font script="Hant" typeface="新細明體"/>
+        <a:font script="Arab" typeface="Times New Roman"/>
+        <a:font script="Hebr" typeface="Times New Roman"/>
+        <a:font script="Thai" typeface="Angsana New"/>
+        <a:font script="Ethi" typeface="Nyala"/>
+        <a:font script="Beng" typeface="Vrinda"/>
+        <a:font script="Gujr" typeface="Shruti"/>
+        <a:font script="Khmr" typeface="MoolBoran"/>
+        <a:font script="Knda" typeface="Tunga"/>
+        <a:font script="Guru" typeface="Raavi"/>
+        <a:font script="Cans" typeface="Euphemia"/>
+        <a:font script="Cher" typeface="Plantagenet Cherokee"/>
+        <a:font script="Yiii" typeface="Microsoft Yi Baiti"/>
+        <a:font script="Tibt" typeface="Microsoft Himalaya"/>
+        <a:font script="Thaa" typeface="MV Boli"/>
+        <a:font script="Deva" typeface="Mangal"/>
+        <a:font script="Telu" typeface="Gautami"/>
+        <a:font script="Taml" typeface="Latha"/>
+        <a:font script="Syrc" typeface="Estrangelo Edessa"/>
+        <a:font script="Orya" typeface="Kalinga"/>
+        <a:font script="Mlym" typeface="Kartika"/>
+        <a:font script="Laoo" typeface="DokChampa"/>
+        <a:font script="Sinh" typeface="Iskoola Pota"/>
+        <a:font script="Mong" typeface="Mongolian Baiti"/>
+        <a:font script="Viet" typeface="Times New Roman"/>
+        <a:font script="Uigh" typeface="Microsoft Uighur"/>
+        <a:font script="Geor" typeface="Sylfaen"/>
+        <a:font script="Armn" typeface="Arial"/>
+        <a:font script="Bugi" typeface="Leelawadee UI"/>
+        <a:font script="Bopo" typeface="Microsoft JhengHei"/>
+        <a:font script="Java" typeface="Javanese Text"/>
+        <a:font script="Lisu" typeface="Segoe UI"/>
+        <a:font script="Mymr" typeface="Myanmar Text"/>
+        <a:font script="Nkoo" typeface="Ebrima"/>
+        <a:font script="Olck" typeface="Nirmala UI"/>
+        <a:font script="Osma" typeface="Ebrima"/>
+        <a:font script="Phag" typeface="Phagspa"/>
+        <a:font script="Syrn" typeface="Estrangelo Edessa"/>
+        <a:font script="Syrj" typeface="Estrangelo Edessa"/>
+        <a:font script="Syre" typeface="Estrangelo Edessa"/>
+        <a:font script="Sora" typeface="Nirmala UI"/>
+        <a:font script="Tale" typeface="Microsoft Tai Le"/>
+        <a:font script="Talu" typeface="Microsoft New Tai Lue"/>
+        <a:font script="Tfng" typeface="Ebrima"/>
+      </a:majorFont>
+      <a:minorFont>
+        <a:latin typeface="Aptos" panose="02110004020202020204"/>
+        <a:ea typeface=""/>
+        <a:cs typeface=""/>
+        <a:font script="Jpan" typeface="游ゴシック"/>
+        <a:font script="Hang" typeface="맑은 고딕"/>
+        <a:font script="Hans" typeface="等线"/>
+        <a:font script="Hant" typeface="新細明體"/>
+        <a:font script="Arab" typeface="Arial"/>
+        <a:font script="Hebr" typeface="Arial"/>
+        <a:font script="Thai" typeface="Cordia New"/>
+        <a:font script="Ethi" typeface="Nyala"/>
+        <a:font script="Beng" typeface="Vrinda"/>
+        <a:font script="Gujr" typeface="Shruti"/>
+        <a:font script="Khmr" typeface="DaunPenh"/>
+        <a:font script="Knda" typeface="Tunga"/>
+        <a:font script="Guru" typeface="Raavi"/>
+        <a:font script="Cans" typeface="Euphemia"/>
+        <a:font script="Cher" typeface="Plantagenet Cherokee"/>
+        <a:font script="Yiii" typeface="Microsoft Yi Baiti"/>
+        <a:font script="Tibt" typeface="Microsoft Himalaya"/>
+        <a:font script="Thaa" typeface="MV Boli"/>
+        <a:font script="Deva" typeface="Mangal"/>
+        <a:font script="Telu" typeface="Gautami"/>
+        <a:font script="Taml" typeface="Latha"/>
+        <a:font script="Syrc" typeface="Estrangelo Edessa"/>
+        <a:font script="Orya" typeface="Kalinga"/>
+        <a:font script="Mlym" typeface="Kartika"/>
+        <a:font script="Laoo" typeface="DokChampa"/>
+        <a:font script="Sinh" typeface="Iskoola Pota"/>
+        <a:font script="Mong" typeface="Mongolian Baiti"/>
+        <a:font script="Viet" typeface="Arial"/>
+        <a:font script="Uigh" typeface="Microsoft Uighur"/>
+        <a:font script="Geor" typeface="Sylfaen"/>
+        <a:font script="Armn" typeface="Arial"/>
+        <a:font script="Bugi" typeface="Leelawadee UI"/>
+        <a:font script="Bopo" typeface="Microsoft JhengHei"/>
+        <a:font script="Java" typeface="Javanese Text"/>
+        <a:font script="Lisu" typeface="Segoe UI"/>
+        <a:font script="Mymr" typeface="Myanmar Text"/>
+        <a:font script="Nkoo" typeface="Ebrima"/>
+        <a:font script="Olck" typeface="Nirmala UI"/>
+        <a:font script="Osma" typeface="Ebrima"/>
+        <a:font script="Phag" typeface="Phagspa"/>
+        <a:font script="Syrn" typeface="Estrangelo Edessa"/>
+        <a:font script="Syrj" typeface="Estrangelo Edessa"/>
+        <a:font script="Syre" typeface="Estrangelo Edessa"/>
+        <a:font script="Sora" typeface="Nirmala UI"/>
+        <a:font script="Tale" typeface="Microsoft Tai Le"/>
+        <a:font script="Talu" typeface="Microsoft New Tai Lue"/>
+        <a:font script="Tfng" typeface="Ebrima"/>
+      </a:minorFont>
+    </a:fontScheme>
+    <a:fmtScheme name="Office">
+      <a:fillStyleLst>
+        <a:solidFill>
+          <a:schemeClr val="phClr"/>
+        </a:solidFill>
+        <a:gradFill rotWithShape="1">
+          <a:gsLst>
+            <a:gs pos="0">
+              <a:schemeClr val="phClr">
+                <a:lumMod val="110000"/>
+                <a:satMod val="105000"/>
+                <a:tint val="67000"/>
+              </a:schemeClr>
+            </a:gs>
+            <a:gs pos="50000">
+              <a:schemeClr val="phClr">
+                <a:lumMod val="105000"/>
+                <a:satMod val="103000"/>
+                <a:tint val="73000"/>
+              </a:schemeClr>
+            </a:gs>
+            <a:gs pos="100000">
+              <a:schemeClr val="phClr">
+                <a:lumMod val="105000"/>
+                <a:satMod val="109000"/>
+                <a:tint val="81000"/>
+              </a:schemeClr>
+            </a:gs>
+          </a:gsLst>
+          <a:lin ang="5400000" scaled="0"/>
+        </a:gradFill>
+        <a:gradFill rotWithShape="1">
+          <a:gsLst>
+            <a:gs pos="0">
+              <a:schemeClr val="phClr">
+                <a:satMod val="103000"/>
+                <a:lumMod val="102000"/>
+                <a:tint val="94000"/>
+              </a:schemeClr>
+            </a:gs>
+            <a:gs pos="50000">
+              <a:schemeClr val="phClr">
+                <a:satMod val="110000"/>
+                <a:lumMod val="100000"/>
+                <a:shade val="100000"/>
+              </a:schemeClr>
+            </a:gs>
+            <a:gs pos="100000">
+              <a:schemeClr val="phClr">
+                <a:lumMod val="99000"/>
+                <a:satMod val="120000"/>
+                <a:shade val="78000"/>
+              </a:schemeClr>
+            </a:gs>
+          </a:gsLst>
+          <a:lin ang="5400000" scaled="0"/>
+        </a:gradFill>
+      </a:fillStyleLst>
+      <a:lnStyleLst>
+        <a:ln w="12700" cap="flat" cmpd="sng" algn="ctr">
+          <a:solidFill>
+            <a:schemeClr val="phClr"/>
+          </a:solidFill>
+          <a:prstDash val="solid"/>
+          <a:miter lim="800000"/>
+        </a:ln>
+        <a:ln w="19050" cap="flat" cmpd="sng" algn="ctr">
+          <a:solidFill>
+            <a:schemeClr val="phClr"/>
+          </a:solidFill>
+          <a:prstDash val="solid"/>
+          <a:miter lim="800000"/>
+        </a:ln>
+        <a:ln w="25400" cap="flat" cmpd="sng" algn="ctr">
+          <a:solidFill>
+            <a:schemeClr val="phClr"/>
+          </a:solidFill>
+          <a:prstDash val="solid"/>
+          <a:miter lim="800000"/>
+        </a:ln>
+      </a:lnStyleLst>
+      <a:effectStyleLst>
+        <a:effectStyle>
+          <a:effectLst/>
+        </a:effectStyle>
+        <a:effectStyle>
+          <a:effectLst/>
+        </a:effectStyle>
+        <a:effectStyle>
+          <a:effectLst>
+            <a:outerShdw blurRad="57150" dist="19050" dir="5400000" algn="ctr" rotWithShape="0">
+              <a:srgbClr val="000000">
+                <a:alpha val="63000"/>
+              </a:srgbClr>
+            </a:outerShdw>
+          </a:effectLst>
+        </a:effectStyle>
+      </a:effectStyleLst>
+      <a:bgFillStyleLst>
+        <a:solidFill>
+          <a:schemeClr val="phClr"/>
+        </a:solidFill>
+        <a:solidFill>
+          <a:schemeClr val="phClr">
+            <a:tint val="95000"/>
+            <a:satMod val="170000"/>
+          </a:schemeClr>
+        </a:solidFill>
+        <a:gradFill rotWithShape="1">
+          <a:gsLst>
+            <a:gs pos="0">
+              <a:schemeClr val="phClr">
+                <a:tint val="93000"/>
+                <a:satMod val="150000"/>
+                <a:shade val="98000"/>
+                <a:lumMod val="102000"/>
+              </a:schemeClr>
+            </a:gs>
+            <a:gs pos="50000">
+              <a:schemeClr val="phClr">
+                <a:tint val="98000"/>
+                <a:satMod val="130000"/>
+                <a:shade val="90000"/>
+                <a:lumMod val="103000"/>
+              </a:schemeClr>
+            </a:gs>
+            <a:gs pos="100000">
+              <a:schemeClr val="phClr">
+                <a:shade val="63000"/>
+                <a:satMod val="120000"/>
+              </a:schemeClr>
+            </a:gs>
+          </a:gsLst>
+          <a:lin ang="5400000" scaled="0"/>
+        </a:gradFill>
+      </a:bgFillStyleLst>
+    </a:fmtScheme>
+  </a:themeElements>
+  <a:objectDefaults>
+    <a:lnDef>
+      <a:spPr/>
+      <a:bodyPr/>
+      <a:lstStyle/>
+      <a:style>
+        <a:lnRef idx="2">
+          <a:schemeClr val="accent1"/>
+        </a:lnRef>
+        <a:fillRef idx="0">
+          <a:schemeClr val="accent1"/>
+        </a:fillRef>
+        <a:effectRef idx="1">
+          <a:schemeClr val="accent1"/>
+        </a:effectRef>
+        <a:fontRef idx="minor">
+          <a:schemeClr val="tx1"/>
+        </a:fontRef>
+      </a:style>
+    </a:lnDef>
+  </a:objectDefaults>
+  <a:extraClrSchemeLst/>
+  <a:extLst>
+    <a:ext uri="{05A4C25C-085E-4340-85A3-A5531E510DB2}">
+      <thm15:themeFamily xmlns:thm15="http://schemas.microsoft.com/office/thememl/2012/main" name="Office Theme" id="{2E142A2C-CD16-42D6-873A-C26D2A0506FA}" vid="{1BDDFF52-6CD6-40A5-AB3C-68EB2F1E4D0A}"/>
+    </a:ext>
+  </a:extLst>
+</a:theme>
 </file>